--- a/decks/englang-p1/englang-p1_ch3_q2-language.pptx
+++ b/decks/englang-p1/englang-p1_ch3_q2-language.pptx
@@ -124,29 +124,29 @@
   <p:extLst>
     <p:ext uri="{521415D9-36F7-43E2-AB2F-B90AF26B5E84}">
       <p14:sectionLst xmlns:p14="http://schemas.microsoft.com/office/powerpoint/2010/main">
-        <p14:section name="Opening" id="{ead3bf49-5a48-fb7b-88be-ff353f752475}">
+        <p14:section name="Opening" id="{7c90958f-6a17-fe47-3fbe-49232fb3835f}">
           <p14:sldIdLst>
             <p14:sldId id="256"/>
           </p14:sldIdLst>
         </p14:section>
-        <p14:section name="Gate" id="{5edd8ebe-2d6c-37a7-0cb9-c9c68370f834}">
+        <p14:section name="Gate" id="{7b258b35-3cb8-7fe0-051c-90bdf3abd81d}">
           <p14:sldIdLst>
             <p14:sldId id="257"/>
             <p14:sldId id="258"/>
           </p14:sldIdLst>
         </p14:section>
-        <p14:section name="Pre-teach" id="{2519f7be-7e16-080e-8fa7-bf94e5c96dcc}">
+        <p14:section name="Pre-teach" id="{d7ea92a4-2454-92ce-8d82-31bdb1a95985}">
           <p14:sldIdLst>
             <p14:sldId id="259"/>
           </p14:sldIdLst>
         </p14:section>
-        <p14:section name="Read-along" id="{a87d9e11-d5e6-a370-43e7-dbc0932f6ca1}">
+        <p14:section name="Read-along" id="{14599bb7-d272-d7e0-8b02-77fad0863231}">
           <p14:sldIdLst>
             <p14:sldId id="260"/>
             <p14:sldId id="261"/>
           </p14:sldIdLst>
         </p14:section>
-        <p14:section name="Teach" id="{ed181ba4-f797-4e67-853d-97c3ec14a8f5}">
+        <p14:section name="Teach" id="{d11e94bc-c22f-9b82-760b-e03d16687d44}">
           <p14:sldIdLst>
             <p14:sldId id="262"/>
             <p14:sldId id="263"/>
@@ -154,7 +154,7 @@
             <p14:sldId id="265"/>
           </p14:sldIdLst>
         </p14:section>
-        <p14:section name="Routes" id="{acf5a97b-0103-3578-0b00-3441c35583d8}">
+        <p14:section name="Routes" id="{c756a8e1-512b-fe03-db86-c9cb5ad84a4c}">
           <p14:sldIdLst>
             <p14:sldId id="266"/>
             <p14:sldId id="267"/>
@@ -162,12 +162,12 @@
             <p14:sldId id="269"/>
           </p14:sldIdLst>
         </p14:section>
-        <p14:section name="Close" id="{5fbe2738-f427-a774-eb44-5733bebc9811}">
+        <p14:section name="Close" id="{bbfc70f8-a83e-e4bd-f58f-165fee7c6ca5}">
           <p14:sldIdLst>
             <p14:sldId id="270"/>
           </p14:sldIdLst>
         </p14:section>
-        <p14:section name="Answers" id="{76efebeb-03cb-589a-8f5e-8fbc2d9f997b}">
+        <p14:section name="Answers" id="{02363048-3bd3-5ef3-e0be-c91d70f3dffd}">
           <p14:sldIdLst>
             <p14:sldId id="271"/>
             <p14:sldId id="272"/>
@@ -1321,7 +1321,7 @@
             <a:r>
               <a:rPr lang="en-US" dirty="0"/>
               <a:t>Answers — task 2: The effect of a short sentence. Reveal the answer; pupils mark their own work in a different colour, then read the "why" together. Same destination for every lane, so one answer serves the whole class.
-Answer: A   It shows how still and determined Nell is, even in the storm.
+Answer: C   It shows how still and determined Nell is, even in the storm.
 Why: The storm moves, rattles and whips, but Nell stays fixed. The short sentence mirrors her stillness and suggests strong determination.
 Ask a Support pupil to explain one step, and a Stretch pupil to share their extension.</a:t>
             </a:r>
@@ -1505,7 +1505,7 @@
               <a:t>Do now — retrieval. Silent, no notes, no help: recall comes before any support. Give about four minutes.
 1. Which of these phrases from Part 1 is a simile?  →  A   “like scraps of torn paper”
 2. Giving human actions or feelings to something that is not human is called ___.  →  personification
-3. How many marks is Question 2 worth?  →  B   8
+3. How many marks is Question 2 worth?  →  C   8
 Circulate: who gets 3/3 (Stretch route), 2/3 (Core), 0–1 (Support)? Use this to route pupils later in the lesson.</a:t>
             </a:r>
             <a:endParaRPr lang="en-US" dirty="0"/>
@@ -1597,7 +1597,7 @@
               <a:t>Answers — pupils mark their own in a different colour, then hands up for 3/3, 2/3, 1/3.
 1. A   “like scraps of torn paper”. A simile compares using ‘like’ or ‘as’: the gulls are compared to scraps of paper.
 2. personification. The lamps being “too tired” is personification.
-3. B   8. Question 2 is worth 8 marks.
+3. C   8. Question 2 is worth 8 marks.
 Say the route each score points to: 3/3 Stretch, 2/3 Core, 0–1 Support. Pupils may choose to move up.</a:t>
             </a:r>
             <a:endParaRPr lang="en-US" dirty="0"/>
@@ -7226,7 +7226,7 @@
                 <a:ea typeface="Calibri" pitchFamily="34" charset="-122"/>
                 <a:cs typeface="Calibri" pitchFamily="34" charset="-120"/>
               </a:rPr>
-              <a:t>It shows how still and determined Nell is, even in the storm.</a:t>
+              <a:t>It makes the paragraph longer and slower.</a:t>
             </a:r>
             <a:endParaRPr lang="en-US" sz="2600" dirty="0"/>
           </a:p>
@@ -7263,7 +7263,7 @@
                 <a:ea typeface="Calibri" pitchFamily="34" charset="-122"/>
                 <a:cs typeface="Calibri" pitchFamily="34" charset="-120"/>
               </a:rPr>
-              <a:t>It tells the reader that the ferry has arrived.</a:t>
+              <a:t>It suggests that Nell has fallen asleep.</a:t>
             </a:r>
             <a:endParaRPr lang="en-US" sz="2600" dirty="0"/>
           </a:p>
@@ -7300,7 +7300,7 @@
                 <a:ea typeface="Calibri" pitchFamily="34" charset="-122"/>
                 <a:cs typeface="Calibri" pitchFamily="34" charset="-120"/>
               </a:rPr>
-              <a:t>It suggests that Nell has fallen asleep.</a:t>
+              <a:t>It shows how still and determined Nell is, even in the storm.</a:t>
             </a:r>
             <a:endParaRPr lang="en-US" sz="2600" dirty="0"/>
           </a:p>
@@ -7337,7 +7337,7 @@
                 <a:ea typeface="Calibri" pitchFamily="34" charset="-122"/>
                 <a:cs typeface="Calibri" pitchFamily="34" charset="-120"/>
               </a:rPr>
-              <a:t>It makes the paragraph longer and slower.</a:t>
+              <a:t>It tells the reader that the ferry has arrived.</a:t>
             </a:r>
             <a:endParaRPr lang="en-US" sz="2600" dirty="0"/>
           </a:p>
@@ -8741,7 +8741,7 @@
                 <a:ea typeface="Calibri" pitchFamily="34" charset="-122"/>
                 <a:cs typeface="Calibri" pitchFamily="34" charset="-120"/>
               </a:rPr>
-              <a:t>“She did not move.”</a:t>
+              <a:t>“The harbour was empty except for the wind.”</a:t>
             </a:r>
             <a:endParaRPr lang="en-US" sz="2400" dirty="0"/>
           </a:p>
@@ -8778,7 +8778,7 @@
                 <a:ea typeface="Calibri" pitchFamily="34" charset="-122"/>
                 <a:cs typeface="Calibri" pitchFamily="34" charset="-120"/>
               </a:rPr>
-              <a:t>“The harbour was empty except for the wind.”</a:t>
+              <a:t>“She did not move.”</a:t>
             </a:r>
             <a:endParaRPr lang="en-US" sz="2400" dirty="0"/>
           </a:p>
@@ -9790,7 +9790,7 @@
                 <a:ea typeface="Cambria" pitchFamily="34" charset="-122"/>
                 <a:cs typeface="Cambria" pitchFamily="34" charset="-120"/>
               </a:rPr>
-              <a:t>A   It shows how still and determined Nell is, even in the storm.</a:t>
+              <a:t>C   It shows how still and determined Nell is, even in the storm.</a:t>
             </a:r>
             <a:endParaRPr lang="en-US" sz="1800" dirty="0"/>
           </a:p>
@@ -10857,7 +10857,7 @@
                 <a:ea typeface="Calibri" pitchFamily="34" charset="-122"/>
                 <a:cs typeface="Calibri" pitchFamily="34" charset="-120"/>
               </a:rPr>
-              <a:t>“She did not move.”</a:t>
+              <a:t>“The harbour was empty except for the wind.”</a:t>
             </a:r>
             <a:endParaRPr lang="en-US" sz="2000" dirty="0"/>
           </a:p>
@@ -10894,7 +10894,7 @@
                 <a:ea typeface="Calibri" pitchFamily="34" charset="-122"/>
                 <a:cs typeface="Calibri" pitchFamily="34" charset="-120"/>
               </a:rPr>
-              <a:t>“The harbour was empty except for the wind.”</a:t>
+              <a:t>“She did not move.”</a:t>
             </a:r>
             <a:endParaRPr lang="en-US" sz="2000" dirty="0"/>
           </a:p>
@@ -11296,7 +11296,7 @@
                 <a:ea typeface="Calibri" pitchFamily="34" charset="-122"/>
                 <a:cs typeface="Calibri" pitchFamily="34" charset="-120"/>
               </a:rPr>
-              <a:t>4</a:t>
+              <a:t>20</a:t>
             </a:r>
             <a:endParaRPr lang="en-US" sz="2400" dirty="0"/>
           </a:p>
@@ -11333,7 +11333,7 @@
                 <a:ea typeface="Calibri" pitchFamily="34" charset="-122"/>
                 <a:cs typeface="Calibri" pitchFamily="34" charset="-120"/>
               </a:rPr>
-              <a:t>8</a:t>
+              <a:t>16</a:t>
             </a:r>
             <a:endParaRPr lang="en-US" sz="2400" dirty="0"/>
           </a:p>
@@ -11370,7 +11370,7 @@
                 <a:ea typeface="Calibri" pitchFamily="34" charset="-122"/>
                 <a:cs typeface="Calibri" pitchFamily="34" charset="-120"/>
               </a:rPr>
-              <a:t>16</a:t>
+              <a:t>8</a:t>
             </a:r>
             <a:endParaRPr lang="en-US" sz="2400" dirty="0"/>
           </a:p>
@@ -11407,7 +11407,7 @@
                 <a:ea typeface="Calibri" pitchFamily="34" charset="-122"/>
                 <a:cs typeface="Calibri" pitchFamily="34" charset="-120"/>
               </a:rPr>
-              <a:t>20</a:t>
+              <a:t>4</a:t>
             </a:r>
             <a:endParaRPr lang="en-US" sz="2400" dirty="0"/>
           </a:p>
@@ -12308,7 +12308,7 @@
                 <a:ea typeface="Calibri" pitchFamily="34" charset="-122"/>
                 <a:cs typeface="Calibri" pitchFamily="34" charset="-120"/>
               </a:rPr>
-              <a:t>B   8</a:t>
+              <a:t>C   8</a:t>
             </a:r>
             <a:endParaRPr lang="en-US" sz="2200" dirty="0"/>
           </a:p>

--- a/decks/englang-p1/englang-p1_ch3_q2-language.pptx
+++ b/decks/englang-p1/englang-p1_ch3_q2-language.pptx
@@ -124,29 +124,29 @@
   <p:extLst>
     <p:ext uri="{521415D9-36F7-43E2-AB2F-B90AF26B5E84}">
       <p14:sectionLst xmlns:p14="http://schemas.microsoft.com/office/powerpoint/2010/main">
-        <p14:section name="Opening" id="{7c90958f-6a17-fe47-3fbe-49232fb3835f}">
+        <p14:section name="Opening" id="{24660a91-1526-4040-33fa-9970a29fafa6}">
           <p14:sldIdLst>
             <p14:sldId id="256"/>
           </p14:sldIdLst>
         </p14:section>
-        <p14:section name="Gate" id="{7b258b35-3cb8-7fe0-051c-90bdf3abd81d}">
+        <p14:section name="Gate" id="{ad6df7a7-b47d-a194-da60-62ef1384e877}">
           <p14:sldIdLst>
             <p14:sldId id="257"/>
             <p14:sldId id="258"/>
           </p14:sldIdLst>
         </p14:section>
-        <p14:section name="Pre-teach" id="{d7ea92a4-2454-92ce-8d82-31bdb1a95985}">
+        <p14:section name="Pre-teach" id="{a7bbad51-b672-283f-6295-1f42584cd9c7}">
           <p14:sldIdLst>
             <p14:sldId id="259"/>
           </p14:sldIdLst>
         </p14:section>
-        <p14:section name="Read-along" id="{14599bb7-d272-d7e0-8b02-77fad0863231}">
+        <p14:section name="Read-along" id="{cf904297-7a3f-218c-4e0b-e81ae5e86fbe}">
           <p14:sldIdLst>
             <p14:sldId id="260"/>
             <p14:sldId id="261"/>
           </p14:sldIdLst>
         </p14:section>
-        <p14:section name="Teach" id="{d11e94bc-c22f-9b82-760b-e03d16687d44}">
+        <p14:section name="Teach" id="{7db37341-0acf-e24b-5f8a-dba0bc460d63}">
           <p14:sldIdLst>
             <p14:sldId id="262"/>
             <p14:sldId id="263"/>
@@ -154,7 +154,7 @@
             <p14:sldId id="265"/>
           </p14:sldIdLst>
         </p14:section>
-        <p14:section name="Routes" id="{c756a8e1-512b-fe03-db86-c9cb5ad84a4c}">
+        <p14:section name="Routes" id="{4644b4ee-e004-9761-a5d3-b56cb94d392f}">
           <p14:sldIdLst>
             <p14:sldId id="266"/>
             <p14:sldId id="267"/>
@@ -162,12 +162,12 @@
             <p14:sldId id="269"/>
           </p14:sldIdLst>
         </p14:section>
-        <p14:section name="Close" id="{bbfc70f8-a83e-e4bd-f58f-165fee7c6ca5}">
+        <p14:section name="Close" id="{b11a6b7b-0869-b574-6400-483e926ca4f2}">
           <p14:sldIdLst>
             <p14:sldId id="270"/>
           </p14:sldIdLst>
         </p14:section>
-        <p14:section name="Answers" id="{02363048-3bd3-5ef3-e0be-c91d70f3dffd}">
+        <p14:section name="Answers" id="{0624029d-cac7-d104-c892-3b7296f5eae5}">
           <p14:sldIdLst>
             <p14:sldId id="271"/>
             <p14:sldId id="272"/>
